--- a/courses/479-fall-2026/479-lecture-4-v2.pptx
+++ b/courses/479-fall-2026/479-lecture-4-v2.pptx
@@ -12753,7 +12753,7 @@
                 </a:solidFill>
                 <a:latin typeface="Iowan Old Style"/>
               </a:rPr>
-              <a:t>Similiarities and differences</a:t>
+              <a:t>Similarities and differences</a:t>
             </a:r>
           </a:p>
         </p:txBody>
